--- a/PRUEBAS_SISTEMA_SIIP_FARMACIAS_AVANCE3.pptx
+++ b/PRUEBAS_SISTEMA_SIIP_FARMACIAS_AVANCE3.pptx
@@ -26,6 +26,7 @@
     <p:sldId id="274" r:id="rId25"/>
     <p:sldId id="275" r:id="rId26"/>
     <p:sldId id="276" r:id="rId27"/>
+    <p:sldId id="277" r:id="rId28"/>
   </p:sldIdLst>
   <p:sldSz cx="12191695" cy="6858000" type="screen4x3"/>
   <p:notesSz cx="6858000" cy="9144000"/>
@@ -4526,7 +4527,7 @@
               </a:defRPr>
             </a:pPr>
             <a:r>
-              <a:t>MÓDULO DE AUTENTICACIÓN Y SEGURIDAD</a:t>
+              <a:t>CONTROL DE ACCESO Y SEGURIDAD RBAC</a:t>
             </a:r>
           </a:p>
           <a:p>
@@ -4541,7 +4542,7 @@
               </a:defRPr>
             </a:pPr>
             <a:r>
-              <a:t>Acceso Seguro con PostgreSQL y BCrypt (CU01)</a:t>
+              <a:t>Los 5 Roles Indispensables del Negocio Farmacéutico (DIGEMID &amp; SUNAT)</a:t>
             </a:r>
           </a:p>
         </p:txBody>
@@ -4581,247 +4582,598 @@
           </a:p>
         </p:txBody>
       </p:sp>
-      <p:sp>
-        <p:nvSpPr>
-          <p:cNvPr id="8" name="Rounded Rectangle 7"/>
-          <p:cNvSpPr/>
-          <p:nvPr/>
-        </p:nvSpPr>
-        <p:spPr>
-          <a:xfrm>
-            <a:off x="548640" y="1188720"/>
-            <a:ext cx="4114800" cy="5303520"/>
-          </a:xfrm>
-          <a:prstGeom prst="roundRect">
-            <a:avLst/>
-          </a:prstGeom>
-          <a:solidFill>
-            <a:srgbClr val="FFFFFF"/>
-          </a:solidFill>
-          <a:ln w="12700">
-            <a:solidFill>
-              <a:srgbClr val="E2E8F0"/>
-            </a:solidFill>
-          </a:ln>
-        </p:spPr>
-        <p:style>
-          <a:lnRef idx="1">
-            <a:schemeClr val="accent1"/>
-          </a:lnRef>
-          <a:fillRef idx="3">
-            <a:schemeClr val="accent1"/>
-          </a:fillRef>
-          <a:effectRef idx="2">
-            <a:schemeClr val="accent1"/>
-          </a:effectRef>
-          <a:fontRef idx="minor">
-            <a:schemeClr val="lt1"/>
-          </a:fontRef>
-        </p:style>
-        <p:txBody>
-          <a:bodyPr rtlCol="0" anchor="ctr"/>
-          <a:lstStyle/>
-          <a:p>
-            <a:pPr algn="ctr"/>
-          </a:p>
-        </p:txBody>
-      </p:sp>
-      <p:sp>
-        <p:nvSpPr>
-          <p:cNvPr id="9" name="TextBox 8"/>
-          <p:cNvSpPr txBox="1"/>
-          <p:nvPr/>
-        </p:nvSpPr>
-        <p:spPr>
-          <a:xfrm>
-            <a:off x="731520" y="1371600"/>
-            <a:ext cx="3749039" cy="4937760"/>
-          </a:xfrm>
-          <a:prstGeom prst="rect">
-            <a:avLst/>
-          </a:prstGeom>
-          <a:noFill/>
-        </p:spPr>
-        <p:txBody>
-          <a:bodyPr wrap="square">
-            <a:spAutoFit/>
-          </a:bodyPr>
-          <a:lstStyle/>
-          <a:p>
-            <a:pPr>
-              <a:defRPr sz="1300" b="1">
-                <a:solidFill>
-                  <a:srgbClr val="002B66"/>
-                </a:solidFill>
-              </a:defRPr>
-            </a:pPr>
-            <a:r>
-              <a:t>🎯 Criterios y Verificación de Prueba:</a:t>
-            </a:r>
-          </a:p>
-          <a:p>
-            <a:pPr>
-              <a:spcBef>
-                <a:spcPts val="1000"/>
-              </a:spcBef>
-              <a:defRPr sz="1100" b="1">
-                <a:solidFill>
-                  <a:srgbClr val="0F172A"/>
-                </a:solidFill>
-              </a:defRPr>
-            </a:pPr>
-            <a:r>
-              <a:t>✔ Persistencia en PostgreSQL: </a:t>
-            </a:r>
-            <a:r>
-              <a:rPr sz="1000" b="0">
-                <a:solidFill>
-                  <a:srgbClr val="64748B"/>
-                </a:solidFill>
-              </a:rPr>
-              <a:t>Validación contra la tabla 'usuarios' con hash BCrypt de alta seguridad ($2a$10$).</a:t>
-            </a:r>
-          </a:p>
-          <a:p>
-            <a:pPr>
-              <a:spcBef>
-                <a:spcPts val="1000"/>
-              </a:spcBef>
-              <a:defRPr sz="1100" b="1">
-                <a:solidFill>
-                  <a:srgbClr val="0F172A"/>
-                </a:solidFill>
-              </a:defRPr>
-            </a:pPr>
-            <a:r>
-              <a:t>✔ Bloqueo a los 5 Intentos (Guava): </a:t>
-            </a:r>
-            <a:r>
-              <a:rPr sz="1000" b="0">
-                <a:solidFill>
-                  <a:srgbClr val="64748B"/>
-                </a:solidFill>
-              </a:rPr>
-              <a:t>Rate limiting en memoria que inhabilita temporalmente la cuenta por 15 minutos.</a:t>
-            </a:r>
-          </a:p>
-          <a:p>
-            <a:pPr>
-              <a:spcBef>
-                <a:spcPts val="1000"/>
-              </a:spcBef>
-              <a:defRPr sz="1100" b="1">
-                <a:solidFill>
-                  <a:srgbClr val="0F172A"/>
-                </a:solidFill>
-              </a:defRPr>
-            </a:pPr>
-            <a:r>
-              <a:t>✔ Cumplimiento Ley 29733: </a:t>
-            </a:r>
-            <a:r>
-              <a:rPr sz="1000" b="0">
-                <a:solidFill>
-                  <a:srgbClr val="64748B"/>
-                </a:solidFill>
-              </a:rPr>
-              <a:t>Consentimiento explícito de tratamiento de datos personales y banner de cookies.</a:t>
-            </a:r>
-          </a:p>
-          <a:p>
-            <a:pPr>
-              <a:spcBef>
-                <a:spcPts val="1000"/>
-              </a:spcBef>
-              <a:defRPr sz="1100" b="1">
-                <a:solidFill>
-                  <a:srgbClr val="0F172A"/>
-                </a:solidFill>
-              </a:defRPr>
-            </a:pPr>
-            <a:r>
-              <a:t>✔ Auditoría en Logback: </a:t>
-            </a:r>
-            <a:r>
-              <a:rPr sz="1000" b="0">
-                <a:solidFill>
-                  <a:srgbClr val="64748B"/>
-                </a:solidFill>
-              </a:rPr>
-              <a:t>Registro en logs/siip-security-audit.log de cada intento exitoso o fallido.</a:t>
-            </a:r>
-          </a:p>
-        </p:txBody>
-      </p:sp>
-      <p:sp>
-        <p:nvSpPr>
-          <p:cNvPr id="10" name="Rectangle 9"/>
-          <p:cNvSpPr/>
-          <p:nvPr/>
-        </p:nvSpPr>
-        <p:spPr>
-          <a:xfrm>
-            <a:off x="4846320" y="1188720"/>
-            <a:ext cx="6766560" cy="5303520"/>
-          </a:xfrm>
-          <a:prstGeom prst="rect">
-            <a:avLst/>
-          </a:prstGeom>
-          <a:solidFill>
-            <a:srgbClr val="FFFFFF"/>
-          </a:solidFill>
-          <a:ln w="19050">
-            <a:solidFill>
-              <a:srgbClr val="E2E8F0"/>
-            </a:solidFill>
-          </a:ln>
-        </p:spPr>
-        <p:style>
-          <a:lnRef idx="1">
-            <a:schemeClr val="accent1"/>
-          </a:lnRef>
-          <a:fillRef idx="3">
-            <a:schemeClr val="accent1"/>
-          </a:fillRef>
-          <a:effectRef idx="2">
-            <a:schemeClr val="accent1"/>
-          </a:effectRef>
-          <a:fontRef idx="minor">
-            <a:schemeClr val="lt1"/>
-          </a:fontRef>
-        </p:style>
-        <p:txBody>
-          <a:bodyPr rtlCol="0" anchor="ctr"/>
-          <a:lstStyle/>
-          <a:p>
-            <a:pPr algn="ctr"/>
-          </a:p>
-        </p:txBody>
-      </p:sp>
-      <p:pic>
-        <p:nvPicPr>
-          <p:cNvPr id="11" name="Picture 10" descr="01_login.png"/>
-          <p:cNvPicPr>
-            <a:picLocks noChangeAspect="1"/>
-          </p:cNvPicPr>
-          <p:nvPr/>
-        </p:nvPicPr>
-        <p:blipFill>
-          <a:blip r:embed="rId2"/>
-          <a:stretch>
-            <a:fillRect/>
-          </a:stretch>
-        </p:blipFill>
-        <p:spPr>
-          <a:xfrm>
-            <a:off x="4892040" y="1234440"/>
-            <a:ext cx="6675120" cy="5212080"/>
-          </a:xfrm>
-          <a:prstGeom prst="rect">
-            <a:avLst/>
-          </a:prstGeom>
-        </p:spPr>
-      </p:pic>
+      <p:graphicFrame>
+        <p:nvGraphicFramePr>
+          <p:cNvPr id="8" name="Table 7"/>
+          <p:cNvGraphicFramePr>
+            <a:graphicFrameLocks noGrp="1"/>
+          </p:cNvGraphicFramePr>
+          <p:nvPr/>
+        </p:nvGraphicFramePr>
+        <p:xfrm>
+          <a:off x="731520" y="1280160"/>
+          <a:ext cx="10698480" cy="4937760"/>
+        </p:xfrm>
+        <a:graphic>
+          <a:graphicData uri="http://schemas.openxmlformats.org/drawingml/2006/table">
+            <a:tbl>
+              <a:tblPr firstRow="1" bandRow="1">
+                <a:tableStyleId>{5C22544A-7EE6-4342-B048-85BDC9FD1C3A}</a:tableStyleId>
+              </a:tblPr>
+              <a:tblGrid>
+                <a:gridCol w="2011680"/>
+                <a:gridCol w="2103120"/>
+                <a:gridCol w="4572000"/>
+                <a:gridCol w="2011680"/>
+              </a:tblGrid>
+              <a:tr h="822960">
+                <a:tc>
+                  <a:txBody>
+                    <a:bodyPr/>
+                    <a:lstStyle/>
+                    <a:p>
+                      <a:pPr>
+                        <a:defRPr b="1" sz="1100">
+                          <a:solidFill>
+                            <a:srgbClr val="FFD100"/>
+                          </a:solidFill>
+                        </a:defRPr>
+                      </a:pPr>
+                      <a:r>
+                        <a:t>Código de Rol (PostgreSQL)</a:t>
+                      </a:r>
+                    </a:p>
+                  </a:txBody>
+                  <a:tcPr>
+                    <a:solidFill>
+                      <a:srgbClr val="002B66"/>
+                    </a:solidFill>
+                  </a:tcPr>
+                </a:tc>
+                <a:tc>
+                  <a:txBody>
+                    <a:bodyPr/>
+                    <a:lstStyle/>
+                    <a:p>
+                      <a:pPr>
+                        <a:defRPr b="1" sz="1100">
+                          <a:solidFill>
+                            <a:srgbClr val="FFD100"/>
+                          </a:solidFill>
+                        </a:defRPr>
+                      </a:pPr>
+                      <a:r>
+                        <a:t>Perfil Operativo</a:t>
+                      </a:r>
+                    </a:p>
+                  </a:txBody>
+                  <a:tcPr>
+                    <a:solidFill>
+                      <a:srgbClr val="002B66"/>
+                    </a:solidFill>
+                  </a:tcPr>
+                </a:tc>
+                <a:tc>
+                  <a:txBody>
+                    <a:bodyPr/>
+                    <a:lstStyle/>
+                    <a:p>
+                      <a:pPr>
+                        <a:defRPr b="1" sz="1100">
+                          <a:solidFill>
+                            <a:srgbClr val="FFD100"/>
+                          </a:solidFill>
+                        </a:defRPr>
+                      </a:pPr>
+                      <a:r>
+                        <a:t>Responsabilidades y Base Legal (DIGEMID / SUNAT)</a:t>
+                      </a:r>
+                    </a:p>
+                  </a:txBody>
+                  <a:tcPr>
+                    <a:solidFill>
+                      <a:srgbClr val="002B66"/>
+                    </a:solidFill>
+                  </a:tcPr>
+                </a:tc>
+                <a:tc>
+                  <a:txBody>
+                    <a:bodyPr/>
+                    <a:lstStyle/>
+                    <a:p>
+                      <a:pPr>
+                        <a:defRPr b="1" sz="1100">
+                          <a:solidFill>
+                            <a:srgbClr val="FFD100"/>
+                          </a:solidFill>
+                        </a:defRPr>
+                      </a:pPr>
+                      <a:r>
+                        <a:t>Usuario de Prueba</a:t>
+                      </a:r>
+                    </a:p>
+                  </a:txBody>
+                  <a:tcPr>
+                    <a:solidFill>
+                      <a:srgbClr val="002B66"/>
+                    </a:solidFill>
+                  </a:tcPr>
+                </a:tc>
+              </a:tr>
+              <a:tr h="822960">
+                <a:tc>
+                  <a:txBody>
+                    <a:bodyPr/>
+                    <a:lstStyle/>
+                    <a:p>
+                      <a:pPr>
+                        <a:defRPr sz="1000" b="1">
+                          <a:solidFill>
+                            <a:srgbClr val="002B66"/>
+                          </a:solidFill>
+                        </a:defRPr>
+                      </a:pPr>
+                      <a:r>
+                        <a:t>ROLE_FARMACEUTICO</a:t>
+                      </a:r>
+                    </a:p>
+                  </a:txBody>
+                  <a:tcPr>
+                    <a:solidFill>
+                      <a:srgbClr val="FFFFFF"/>
+                    </a:solidFill>
+                  </a:tcPr>
+                </a:tc>
+                <a:tc>
+                  <a:txBody>
+                    <a:bodyPr/>
+                    <a:lstStyle/>
+                    <a:p>
+                      <a:pPr>
+                        <a:defRPr sz="1000" b="0">
+                          <a:solidFill>
+                            <a:srgbClr val="0F172A"/>
+                          </a:solidFill>
+                        </a:defRPr>
+                      </a:pPr>
+                      <a:r>
+                        <a:t>Químico Farmacéutico (Director Técnico)</a:t>
+                      </a:r>
+                    </a:p>
+                  </a:txBody>
+                  <a:tcPr>
+                    <a:solidFill>
+                      <a:srgbClr val="FFFFFF"/>
+                    </a:solidFill>
+                  </a:tcPr>
+                </a:tc>
+                <a:tc>
+                  <a:txBody>
+                    <a:bodyPr/>
+                    <a:lstStyle/>
+                    <a:p>
+                      <a:pPr>
+                        <a:defRPr sz="1000" b="0">
+                          <a:solidFill>
+                            <a:srgbClr val="0F172A"/>
+                          </a:solidFill>
+                        </a:defRPr>
+                      </a:pPr>
+                      <a:r>
+                        <a:t>Dispensación ética, recetas médicas, control FEFO de psicotrópicos y transferencias inter-sucursales (Ley 29459, R.M. 833-2015).</a:t>
+                      </a:r>
+                    </a:p>
+                  </a:txBody>
+                  <a:tcPr>
+                    <a:solidFill>
+                      <a:srgbClr val="FFFFFF"/>
+                    </a:solidFill>
+                  </a:tcPr>
+                </a:tc>
+                <a:tc>
+                  <a:txBody>
+                    <a:bodyPr/>
+                    <a:lstStyle/>
+                    <a:p>
+                      <a:pPr>
+                        <a:defRPr sz="1000" b="1">
+                          <a:solidFill>
+                            <a:srgbClr val="C8102E"/>
+                          </a:solidFill>
+                        </a:defRPr>
+                      </a:pPr>
+                      <a:r>
+                        <a:t>qf_mendoza (CQFP 18492)</a:t>
+                      </a:r>
+                    </a:p>
+                  </a:txBody>
+                  <a:tcPr>
+                    <a:solidFill>
+                      <a:srgbClr val="FFFFFF"/>
+                    </a:solidFill>
+                  </a:tcPr>
+                </a:tc>
+              </a:tr>
+              <a:tr h="822960">
+                <a:tc>
+                  <a:txBody>
+                    <a:bodyPr/>
+                    <a:lstStyle/>
+                    <a:p>
+                      <a:pPr>
+                        <a:defRPr sz="1000" b="1">
+                          <a:solidFill>
+                            <a:srgbClr val="002B66"/>
+                          </a:solidFill>
+                        </a:defRPr>
+                      </a:pPr>
+                      <a:r>
+                        <a:t>ROLE_ADMIN_CD</a:t>
+                      </a:r>
+                    </a:p>
+                  </a:txBody>
+                  <a:tcPr>
+                    <a:solidFill>
+                      <a:srgbClr val="F1F5F9"/>
+                    </a:solidFill>
+                  </a:tcPr>
+                </a:tc>
+                <a:tc>
+                  <a:txBody>
+                    <a:bodyPr/>
+                    <a:lstStyle/>
+                    <a:p>
+                      <a:pPr>
+                        <a:defRPr sz="1000" b="0">
+                          <a:solidFill>
+                            <a:srgbClr val="0F172A"/>
+                          </a:solidFill>
+                        </a:defRPr>
+                      </a:pPr>
+                      <a:r>
+                        <a:t>Administrador CD (Huachipa)</a:t>
+                      </a:r>
+                    </a:p>
+                  </a:txBody>
+                  <a:tcPr>
+                    <a:solidFill>
+                      <a:srgbClr val="F1F5F9"/>
+                    </a:solidFill>
+                  </a:tcPr>
+                </a:tc>
+                <a:tc>
+                  <a:txBody>
+                    <a:bodyPr/>
+                    <a:lstStyle/>
+                    <a:p>
+                      <a:pPr>
+                        <a:defRPr sz="1000" b="0">
+                          <a:solidFill>
+                            <a:srgbClr val="0F172A"/>
+                          </a:solidFill>
+                        </a:defRPr>
+                      </a:pPr>
+                      <a:r>
+                        <a:t>Gestión logística mayorista, emisión de Guías Remitente SUNAT con QR/HASH, despacho inter-sedes y recepción de laboratorios.</a:t>
+                      </a:r>
+                    </a:p>
+                  </a:txBody>
+                  <a:tcPr>
+                    <a:solidFill>
+                      <a:srgbClr val="F1F5F9"/>
+                    </a:solidFill>
+                  </a:tcPr>
+                </a:tc>
+                <a:tc>
+                  <a:txBody>
+                    <a:bodyPr/>
+                    <a:lstStyle/>
+                    <a:p>
+                      <a:pPr>
+                        <a:defRPr sz="1000" b="1">
+                          <a:solidFill>
+                            <a:srgbClr val="C8102E"/>
+                          </a:solidFill>
+                        </a:defRPr>
+                      </a:pPr>
+                      <a:r>
+                        <a:t>admin_cd_huachipa (CIP 84920)</a:t>
+                      </a:r>
+                    </a:p>
+                  </a:txBody>
+                  <a:tcPr>
+                    <a:solidFill>
+                      <a:srgbClr val="F1F5F9"/>
+                    </a:solidFill>
+                  </a:tcPr>
+                </a:tc>
+              </a:tr>
+              <a:tr h="822960">
+                <a:tc>
+                  <a:txBody>
+                    <a:bodyPr/>
+                    <a:lstStyle/>
+                    <a:p>
+                      <a:pPr>
+                        <a:defRPr sz="1000" b="1">
+                          <a:solidFill>
+                            <a:srgbClr val="002B66"/>
+                          </a:solidFill>
+                        </a:defRPr>
+                      </a:pPr>
+                      <a:r>
+                        <a:t>ROLE_SUPERVISOR</a:t>
+                      </a:r>
+                    </a:p>
+                  </a:txBody>
+                  <a:tcPr>
+                    <a:solidFill>
+                      <a:srgbClr val="FFFFFF"/>
+                    </a:solidFill>
+                  </a:tcPr>
+                </a:tc>
+                <a:tc>
+                  <a:txBody>
+                    <a:bodyPr/>
+                    <a:lstStyle/>
+                    <a:p>
+                      <a:pPr>
+                        <a:defRPr sz="1000" b="0">
+                          <a:solidFill>
+                            <a:srgbClr val="0F172A"/>
+                          </a:solidFill>
+                        </a:defRPr>
+                      </a:pPr>
+                      <a:r>
+                        <a:t>Supervisor Regional Operaciones</a:t>
+                      </a:r>
+                    </a:p>
+                  </a:txBody>
+                  <a:tcPr>
+                    <a:solidFill>
+                      <a:srgbClr val="FFFFFF"/>
+                    </a:solidFill>
+                  </a:tcPr>
+                </a:tc>
+                <a:tc>
+                  <a:txBody>
+                    <a:bodyPr/>
+                    <a:lstStyle/>
+                    <a:p>
+                      <a:pPr>
+                        <a:defRPr sz="1000" b="0">
+                          <a:solidFill>
+                            <a:srgbClr val="0F172A"/>
+                          </a:solidFill>
+                        </a:defRPr>
+                      </a:pPr>
+                      <a:r>
+                        <a:t>Monitoreo global de la red (15 sedes a nivel nacional), balanceo de sobrestock entre boticas, control de mermas y auditoría.</a:t>
+                      </a:r>
+                    </a:p>
+                  </a:txBody>
+                  <a:tcPr>
+                    <a:solidFill>
+                      <a:srgbClr val="FFFFFF"/>
+                    </a:solidFill>
+                  </a:tcPr>
+                </a:tc>
+                <a:tc>
+                  <a:txBody>
+                    <a:bodyPr/>
+                    <a:lstStyle/>
+                    <a:p>
+                      <a:pPr>
+                        <a:defRPr sz="1000" b="1">
+                          <a:solidFill>
+                            <a:srgbClr val="C8102E"/>
+                          </a:solidFill>
+                        </a:defRPr>
+                      </a:pPr>
+                      <a:r>
+                        <a:t>supervisor_nacional</a:t>
+                      </a:r>
+                    </a:p>
+                  </a:txBody>
+                  <a:tcPr>
+                    <a:solidFill>
+                      <a:srgbClr val="FFFFFF"/>
+                    </a:solidFill>
+                  </a:tcPr>
+                </a:tc>
+              </a:tr>
+              <a:tr h="822960">
+                <a:tc>
+                  <a:txBody>
+                    <a:bodyPr/>
+                    <a:lstStyle/>
+                    <a:p>
+                      <a:pPr>
+                        <a:defRPr sz="1000" b="1">
+                          <a:solidFill>
+                            <a:srgbClr val="002B66"/>
+                          </a:solidFill>
+                        </a:defRPr>
+                      </a:pPr>
+                      <a:r>
+                        <a:t>ROLE_ASISTENTE_FARMACIA</a:t>
+                      </a:r>
+                    </a:p>
+                  </a:txBody>
+                  <a:tcPr>
+                    <a:solidFill>
+                      <a:srgbClr val="F1F5F9"/>
+                    </a:solidFill>
+                  </a:tcPr>
+                </a:tc>
+                <a:tc>
+                  <a:txBody>
+                    <a:bodyPr/>
+                    <a:lstStyle/>
+                    <a:p>
+                      <a:pPr>
+                        <a:defRPr sz="1000" b="0">
+                          <a:solidFill>
+                            <a:srgbClr val="0F172A"/>
+                          </a:solidFill>
+                        </a:defRPr>
+                      </a:pPr>
+                      <a:r>
+                        <a:t>Técnico en Farmacia (Ventanilla)</a:t>
+                      </a:r>
+                    </a:p>
+                  </a:txBody>
+                  <a:tcPr>
+                    <a:solidFill>
+                      <a:srgbClr val="F1F5F9"/>
+                    </a:solidFill>
+                  </a:tcPr>
+                </a:tc>
+                <a:tc>
+                  <a:txBody>
+                    <a:bodyPr/>
+                    <a:lstStyle/>
+                    <a:p>
+                      <a:pPr>
+                        <a:defRPr sz="1000" b="0">
+                          <a:solidFill>
+                            <a:srgbClr val="0F172A"/>
+                          </a:solidFill>
+                        </a:defRPr>
+                      </a:pPr>
+                      <a:r>
+                        <a:t>Atención en ventanilla, consulta rápida de genéricos DCI con fotos en Cloudflare R2, registro de venta y recepción conforme.</a:t>
+                      </a:r>
+                    </a:p>
+                  </a:txBody>
+                  <a:tcPr>
+                    <a:solidFill>
+                      <a:srgbClr val="F1F5F9"/>
+                    </a:solidFill>
+                  </a:tcPr>
+                </a:tc>
+                <a:tc>
+                  <a:txBody>
+                    <a:bodyPr/>
+                    <a:lstStyle/>
+                    <a:p>
+                      <a:pPr>
+                        <a:defRPr sz="1000" b="1">
+                          <a:solidFill>
+                            <a:srgbClr val="C8102E"/>
+                          </a:solidFill>
+                        </a:defRPr>
+                      </a:pPr>
+                      <a:r>
+                        <a:t>tecnico_ventanilla</a:t>
+                      </a:r>
+                    </a:p>
+                  </a:txBody>
+                  <a:tcPr>
+                    <a:solidFill>
+                      <a:srgbClr val="F1F5F9"/>
+                    </a:solidFill>
+                  </a:tcPr>
+                </a:tc>
+              </a:tr>
+              <a:tr h="822960">
+                <a:tc>
+                  <a:txBody>
+                    <a:bodyPr/>
+                    <a:lstStyle/>
+                    <a:p>
+                      <a:pPr>
+                        <a:defRPr sz="1000" b="1">
+                          <a:solidFill>
+                            <a:srgbClr val="002B66"/>
+                          </a:solidFill>
+                        </a:defRPr>
+                      </a:pPr>
+                      <a:r>
+                        <a:t>ROLE_AUDITOR_CALIDAD</a:t>
+                      </a:r>
+                    </a:p>
+                  </a:txBody>
+                  <a:tcPr>
+                    <a:solidFill>
+                      <a:srgbClr val="FFFFFF"/>
+                    </a:solidFill>
+                  </a:tcPr>
+                </a:tc>
+                <a:tc>
+                  <a:txBody>
+                    <a:bodyPr/>
+                    <a:lstStyle/>
+                    <a:p>
+                      <a:pPr>
+                        <a:defRPr sz="1000" b="0">
+                          <a:solidFill>
+                            <a:srgbClr val="0F172A"/>
+                          </a:solidFill>
+                        </a:defRPr>
+                      </a:pPr>
+                      <a:r>
+                        <a:t>Auditor Calidad &amp; DIGEMID</a:t>
+                      </a:r>
+                    </a:p>
+                  </a:txBody>
+                  <a:tcPr>
+                    <a:solidFill>
+                      <a:srgbClr val="FFFFFF"/>
+                    </a:solidFill>
+                  </a:tcPr>
+                </a:tc>
+                <a:tc>
+                  <a:txBody>
+                    <a:bodyPr/>
+                    <a:lstStyle/>
+                    <a:p>
+                      <a:pPr>
+                        <a:defRPr sz="1000" b="0">
+                          <a:solidFill>
+                            <a:srgbClr val="0F172A"/>
+                          </a:solidFill>
+                        </a:defRPr>
+                      </a:pPr>
+                      <a:r>
+                        <a:t>Fiscalización de Buenas Prácticas de Almacenamiento (BPA), trazabilidad FEFO de lotes por vencer y descarga de reportes Apache POI.</a:t>
+                      </a:r>
+                    </a:p>
+                  </a:txBody>
+                  <a:tcPr>
+                    <a:solidFill>
+                      <a:srgbClr val="FFFFFF"/>
+                    </a:solidFill>
+                  </a:tcPr>
+                </a:tc>
+                <a:tc>
+                  <a:txBody>
+                    <a:bodyPr/>
+                    <a:lstStyle/>
+                    <a:p>
+                      <a:pPr>
+                        <a:defRPr sz="1000" b="1">
+                          <a:solidFill>
+                            <a:srgbClr val="C8102E"/>
+                          </a:solidFill>
+                        </a:defRPr>
+                      </a:pPr>
+                      <a:r>
+                        <a:t>auditor_digemid (CQFP 14205)</a:t>
+                      </a:r>
+                    </a:p>
+                  </a:txBody>
+                  <a:tcPr>
+                    <a:solidFill>
+                      <a:srgbClr val="FFFFFF"/>
+                    </a:solidFill>
+                  </a:tcPr>
+                </a:tc>
+              </a:tr>
+            </a:tbl>
+          </a:graphicData>
+        </a:graphic>
+      </p:graphicFrame>
     </p:spTree>
   </p:cSld>
   <p:clrMapOvr>
@@ -5051,7 +5403,7 @@
               </a:defRPr>
             </a:pPr>
             <a:r>
-              <a:t>DASHBOARD OPERATIVO Y MÉTRICAS</a:t>
+              <a:t>MÓDULO DE AUTENTICACIÓN Y SEGURIDAD</a:t>
             </a:r>
           </a:p>
           <a:p>
@@ -5066,7 +5418,7 @@
               </a:defRPr>
             </a:pPr>
             <a:r>
-              <a:t>Panel de Control Ejecutivo &amp; Red de 15 Sedes</a:t>
+              <a:t>Acceso Seguro con PostgreSQL y BCrypt (CU01)</a:t>
             </a:r>
           </a:p>
         </p:txBody>
@@ -5196,7 +5548,7 @@
               </a:defRPr>
             </a:pPr>
             <a:r>
-              <a:t>✔ Visibilidad en Tiempo Real: </a:t>
+              <a:t>✔ Persistencia en PostgreSQL: </a:t>
             </a:r>
             <a:r>
               <a:rPr sz="1000" b="0">
@@ -5204,7 +5556,7 @@
                   <a:srgbClr val="64748B"/>
                 </a:solidFill>
               </a:rPr>
-              <a:t>Monitoreo del inventario total valorizado en soles (PEN) en toda la cadena.</a:t>
+              <a:t>Validación contra la tabla 'usuarios' con hash BCrypt de alta seguridad ($2a$10$).</a:t>
             </a:r>
           </a:p>
           <a:p>
@@ -5219,7 +5571,7 @@
               </a:defRPr>
             </a:pPr>
             <a:r>
-              <a:t>✔ Indicador de Quiebres Críticos: </a:t>
+              <a:t>✔ Bloqueo a los 5 Intentos (Guava): </a:t>
             </a:r>
             <a:r>
               <a:rPr sz="1000" b="0">
@@ -5227,7 +5579,7 @@
                   <a:srgbClr val="64748B"/>
                 </a:solidFill>
               </a:rPr>
-              <a:t>Alerta temprana de ítems en stock cero o próximo a agotarse con semaforización.</a:t>
+              <a:t>Rate limiting en memoria que inhabilita temporalmente la cuenta por 15 minutos.</a:t>
             </a:r>
           </a:p>
           <a:p>
@@ -5242,7 +5594,7 @@
               </a:defRPr>
             </a:pPr>
             <a:r>
-              <a:t>✔ Trazabilidad de Traslados: </a:t>
+              <a:t>✔ Cumplimiento Ley 29733: </a:t>
             </a:r>
             <a:r>
               <a:rPr sz="1000" b="0">
@@ -5250,7 +5602,7 @@
                   <a:srgbClr val="64748B"/>
                 </a:solidFill>
               </a:rPr>
-              <a:t>Contador de órdenes de transferencia pendientes, despachadas y recepcionadas.</a:t>
+              <a:t>Consentimiento explícito de tratamiento de datos personales y banner de cookies.</a:t>
             </a:r>
           </a:p>
           <a:p>
@@ -5265,7 +5617,7 @@
               </a:defRPr>
             </a:pPr>
             <a:r>
-              <a:t>✔ Repositorio Cloudflare R2: </a:t>
+              <a:t>✔ Auditoría en Logback: </a:t>
             </a:r>
             <a:r>
               <a:rPr sz="1000" b="0">
@@ -5273,7 +5625,7 @@
                   <a:srgbClr val="64748B"/>
                 </a:solidFill>
               </a:rPr>
-              <a:t>Verificación del bucket público para almacenamiento de fichas técnicas.</a:t>
+              <a:t>Registro en logs/siip-security-audit.log de cada intento exitoso o fallido.</a:t>
             </a:r>
           </a:p>
         </p:txBody>
@@ -5325,7 +5677,7 @@
       </p:sp>
       <p:pic>
         <p:nvPicPr>
-          <p:cNvPr id="11" name="Picture 10" descr="02_dashboard.png"/>
+          <p:cNvPr id="11" name="Picture 10" descr="01_login.png"/>
           <p:cNvPicPr>
             <a:picLocks noChangeAspect="1"/>
           </p:cNvPicPr>
@@ -5576,7 +5928,7 @@
               </a:defRPr>
             </a:pPr>
             <a:r>
-              <a:t>MÓDULO DE INVENTARIO GEOCERCANO</a:t>
+              <a:t>DASHBOARD OPERATIVO Y MÉTRICAS</a:t>
             </a:r>
           </a:p>
           <a:p>
@@ -5591,7 +5943,7 @@
               </a:defRPr>
             </a:pPr>
             <a:r>
-              <a:t>Búsqueda Inteligente e Inventario Geocercano (CU02)</a:t>
+              <a:t>Panel de Control Ejecutivo &amp; Red de 15 Sedes</a:t>
             </a:r>
           </a:p>
         </p:txBody>
@@ -5721,7 +6073,7 @@
               </a:defRPr>
             </a:pPr>
             <a:r>
-              <a:t>✔ Algoritmo Haversine: </a:t>
+              <a:t>✔ Visibilidad en Tiempo Real: </a:t>
             </a:r>
             <a:r>
               <a:rPr sz="1000" b="0">
@@ -5729,7 +6081,7 @@
                   <a:srgbClr val="64748B"/>
                 </a:solidFill>
               </a:rPr>
-              <a:t>Cálculo geodésico exacto en kilómetros entre la sede del paciente y sedes donantes (&lt;10km).</a:t>
+              <a:t>Monitoreo del inventario total valorizado en soles (PEN) en toda la cadena.</a:t>
             </a:r>
           </a:p>
           <a:p>
@@ -5744,7 +6096,7 @@
               </a:defRPr>
             </a:pPr>
             <a:r>
-              <a:t>✔ Red Nacional de 15 Sedes: </a:t>
+              <a:t>✔ Indicador de Quiebres Críticos: </a:t>
             </a:r>
             <a:r>
               <a:rPr sz="1000" b="0">
@@ -5752,7 +6104,7 @@
                   <a:srgbClr val="64748B"/>
                 </a:solidFill>
               </a:rPr>
-              <a:t>Cobertura completa en Lima, Arequipa, Cusco, Trujillo, Chiclayo y Huancayo.</a:t>
+              <a:t>Alerta temprana de ítems en stock cero o próximo a agotarse con semaforización.</a:t>
             </a:r>
           </a:p>
           <a:p>
@@ -5767,7 +6119,7 @@
               </a:defRPr>
             </a:pPr>
             <a:r>
-              <a:t>✔ Filtros Macrorregionales: </a:t>
+              <a:t>✔ Trazabilidad de Traslados: </a:t>
             </a:r>
             <a:r>
               <a:rPr sz="1000" b="0">
@@ -5775,7 +6127,7 @@
                   <a:srgbClr val="64748B"/>
                 </a:solidFill>
               </a:rPr>
-              <a:t>Segmentación rápida por Norte, Centro, Sur y Lima con buscador por distrito.</a:t>
+              <a:t>Contador de órdenes de transferencia pendientes, despachadas y recepcionadas.</a:t>
             </a:r>
           </a:p>
           <a:p>
@@ -5790,7 +6142,7 @@
               </a:defRPr>
             </a:pPr>
             <a:r>
-              <a:t>✔ Doble Acción Inmediata: </a:t>
+              <a:t>✔ Repositorio Cloudflare R2: </a:t>
             </a:r>
             <a:r>
               <a:rPr sz="1000" b="0">
@@ -5798,7 +6150,7 @@
                   <a:srgbClr val="64748B"/>
                 </a:solidFill>
               </a:rPr>
-              <a:t>Botón directo 'Ruta &amp; Mapa' para orientar al paciente y 'Solicitar Traslado'.</a:t>
+              <a:t>Verificación del bucket público para almacenamiento de fichas técnicas.</a:t>
             </a:r>
           </a:p>
         </p:txBody>
@@ -5850,7 +6202,7 @@
       </p:sp>
       <p:pic>
         <p:nvPicPr>
-          <p:cNvPr id="11" name="Picture 10" descr="03_inventario_geocercano.png"/>
+          <p:cNvPr id="11" name="Picture 10" descr="02_dashboard.png"/>
           <p:cNvPicPr>
             <a:picLocks noChangeAspect="1"/>
           </p:cNvPicPr>
@@ -6101,7 +6453,7 @@
               </a:defRPr>
             </a:pPr>
             <a:r>
-              <a:t>MÓDULO DE COMPENSACIÓN DE STOCK</a:t>
+              <a:t>MÓDULO DE INVENTARIO GEOCERCANO</a:t>
             </a:r>
           </a:p>
           <a:p>
@@ -6116,7 +6468,7 @@
               </a:defRPr>
             </a:pPr>
             <a:r>
-              <a:t>Solicitud de Traslado Inter-Sedes con IA (CU03)</a:t>
+              <a:t>Búsqueda Inteligente e Inventario Geocercano (CU02)</a:t>
             </a:r>
           </a:p>
         </p:txBody>
@@ -6246,7 +6598,7 @@
               </a:defRPr>
             </a:pPr>
             <a:r>
-              <a:t>✔ Lote Sugerido por IA: </a:t>
+              <a:t>✔ Algoritmo Haversine: </a:t>
             </a:r>
             <a:r>
               <a:rPr sz="1000" b="0">
@@ -6254,7 +6606,7 @@
                   <a:srgbClr val="64748B"/>
                 </a:solidFill>
               </a:rPr>
-              <a:t>Cálculo algorítmico que optimiza el stock receptor sin desabastecer la sede donante.</a:t>
+              <a:t>Cálculo geodésico exacto en kilómetros entre la sede del paciente y sedes donantes (&lt;10km).</a:t>
             </a:r>
           </a:p>
           <a:p>
@@ -6269,7 +6621,7 @@
               </a:defRPr>
             </a:pPr>
             <a:r>
-              <a:t>✔ Simulación Antes ➔ Después: </a:t>
+              <a:t>✔ Red Nacional de 15 Sedes: </a:t>
             </a:r>
             <a:r>
               <a:rPr sz="1000" b="0">
@@ -6277,7 +6629,7 @@
                   <a:srgbClr val="64748B"/>
                 </a:solidFill>
               </a:rPr>
-              <a:t>Proyección visual del saldo restante en origen y el nuevo stock en destino.</a:t>
+              <a:t>Cobertura completa en Lima, Arequipa, Cusco, Trujillo, Chiclayo y Huancayo.</a:t>
             </a:r>
           </a:p>
           <a:p>
@@ -6292,7 +6644,7 @@
               </a:defRPr>
             </a:pPr>
             <a:r>
-              <a:t>✔ Valoración Económica Automática: </a:t>
+              <a:t>✔ Filtros Macrorregionales: </a:t>
             </a:r>
             <a:r>
               <a:rPr sz="1000" b="0">
@@ -6300,7 +6652,7 @@
                   <a:srgbClr val="64748B"/>
                 </a:solidFill>
               </a:rPr>
-              <a:t>Cálculo del costo total en soles (S/ PEN) del lote para control de mermas.</a:t>
+              <a:t>Segmentación rápida por Norte, Centro, Sur y Lima con buscador por distrito.</a:t>
             </a:r>
           </a:p>
           <a:p>
@@ -6315,7 +6667,7 @@
               </a:defRPr>
             </a:pPr>
             <a:r>
-              <a:t>✔ Priorización Operativa: </a:t>
+              <a:t>✔ Doble Acción Inmediata: </a:t>
             </a:r>
             <a:r>
               <a:rPr sz="1000" b="0">
@@ -6323,7 +6675,7 @@
                   <a:srgbClr val="64748B"/>
                 </a:solidFill>
               </a:rPr>
-              <a:t>Opciones de despacho Normal (4h), Urgente (1-2h) o Crítico Express.</a:t>
+              <a:t>Botón directo 'Ruta &amp; Mapa' para orientar al paciente y 'Solicitar Traslado'.</a:t>
             </a:r>
           </a:p>
         </p:txBody>
@@ -6375,7 +6727,7 @@
       </p:sp>
       <p:pic>
         <p:nvPicPr>
-          <p:cNvPr id="11" name="Picture 10" descr="04_modal_solicitar_traslado.png"/>
+          <p:cNvPr id="11" name="Picture 10" descr="03_inventario_geocercano.png"/>
           <p:cNvPicPr>
             <a:picLocks noChangeAspect="1"/>
           </p:cNvPicPr>
@@ -6626,7 +6978,7 @@
               </a:defRPr>
             </a:pPr>
             <a:r>
-              <a:t>MÓDULO DE EXPERIENCIA DEL PACIENTE</a:t>
+              <a:t>MÓDULO DE COMPENSACIÓN DE STOCK</a:t>
             </a:r>
           </a:p>
           <a:p>
@@ -6641,7 +6993,7 @@
               </a:defRPr>
             </a:pPr>
             <a:r>
-              <a:t>Minimapa de Orientación y Guía WhatsApp al Paciente</a:t>
+              <a:t>Solicitud de Traslado Inter-Sedes con IA (CU03)</a:t>
             </a:r>
           </a:p>
         </p:txBody>
@@ -6771,7 +7123,7 @@
               </a:defRPr>
             </a:pPr>
             <a:r>
-              <a:t>✔ Geolocalización Dinámica OSM: </a:t>
+              <a:t>✔ Lote Sugerido por IA: </a:t>
             </a:r>
             <a:r>
               <a:rPr sz="1000" b="0">
@@ -6779,7 +7131,7 @@
                   <a:srgbClr val="64748B"/>
                 </a:solidFill>
               </a:rPr>
-              <a:t>Minimapa interactivo OpenStreetMap centrado en las coordenadas de la botica donante.</a:t>
+              <a:t>Cálculo algorítmico que optimiza el stock receptor sin desabastecer la sede donante.</a:t>
             </a:r>
           </a:p>
           <a:p>
@@ -6794,7 +7146,7 @@
               </a:defRPr>
             </a:pPr>
             <a:r>
-              <a:t>✔ Estimación de Tiempos: </a:t>
+              <a:t>✔ Simulación Antes ➔ Después: </a:t>
             </a:r>
             <a:r>
               <a:rPr sz="1000" b="0">
@@ -6802,7 +7154,7 @@
                   <a:srgbClr val="64748B"/>
                 </a:solidFill>
               </a:rPr>
-              <a:t>Cálculo del tiempo promedio en automóvil y a pie hacia la sucursal con stock.</a:t>
+              <a:t>Proyección visual del saldo restante en origen y el nuevo stock en destino.</a:t>
             </a:r>
           </a:p>
           <a:p>
@@ -6817,7 +7169,7 @@
               </a:defRPr>
             </a:pPr>
             <a:r>
-              <a:t>✔ Generador WhatsApp: </a:t>
+              <a:t>✔ Valoración Económica Automática: </a:t>
             </a:r>
             <a:r>
               <a:rPr sz="1000" b="0">
@@ -6825,7 +7177,7 @@
                   <a:srgbClr val="64748B"/>
                 </a:solidFill>
               </a:rPr>
-              <a:t>Copia formal con dirección, referencia, stock y enlace a Google Maps para el paciente.</a:t>
+              <a:t>Cálculo del costo total en soles (S/ PEN) del lote para control de mermas.</a:t>
             </a:r>
           </a:p>
           <a:p>
@@ -6840,7 +7192,7 @@
               </a:defRPr>
             </a:pPr>
             <a:r>
-              <a:t>✔ No Pérdida de Venta: </a:t>
+              <a:t>✔ Priorización Operativa: </a:t>
             </a:r>
             <a:r>
               <a:rPr sz="1000" b="0">
@@ -6848,7 +7200,7 @@
                   <a:srgbClr val="64748B"/>
                 </a:solidFill>
               </a:rPr>
-              <a:t>Garantiza que el paciente encuentre su medicina en la misma cadena en &lt;10 minutos.</a:t>
+              <a:t>Opciones de despacho Normal (4h), Urgente (1-2h) o Crítico Express.</a:t>
             </a:r>
           </a:p>
         </p:txBody>
@@ -6900,7 +7252,7 @@
       </p:sp>
       <p:pic>
         <p:nvPicPr>
-          <p:cNvPr id="11" name="Picture 10" descr="05_modal_ruta_mapa.png"/>
+          <p:cNvPr id="11" name="Picture 10" descr="04_modal_solicitar_traslado.png"/>
           <p:cNvPicPr>
             <a:picLocks noChangeAspect="1"/>
           </p:cNvPicPr>
@@ -7151,7 +7503,7 @@
               </a:defRPr>
             </a:pPr>
             <a:r>
-              <a:t>MÓDULO DE GESTIÓN DE PRODUCTOS</a:t>
+              <a:t>MÓDULO DE EXPERIENCIA DEL PACIENTE</a:t>
             </a:r>
           </a:p>
           <a:p>
@@ -7166,7 +7518,7 @@
               </a:defRPr>
             </a:pPr>
             <a:r>
-              <a:t>Gestión de Catálogo y Productos Farmacéuticos</a:t>
+              <a:t>Minimapa de Orientación y Guía WhatsApp al Paciente</a:t>
             </a:r>
           </a:p>
         </p:txBody>
@@ -7296,7 +7648,7 @@
               </a:defRPr>
             </a:pPr>
             <a:r>
-              <a:t>✔ Catálogo Multicategoría: </a:t>
+              <a:t>✔ Geolocalización Dinámica OSM: </a:t>
             </a:r>
             <a:r>
               <a:rPr sz="1000" b="0">
@@ -7304,7 +7656,7 @@
                   <a:srgbClr val="64748B"/>
                 </a:solidFill>
               </a:rPr>
-              <a:t>Antibióticos, Analgésicos, Antiinflamatorios y Oncológicos con EAN-13 y CAN DIGEMID.</a:t>
+              <a:t>Minimapa interactivo OpenStreetMap centrado en las coordenadas de la botica donante.</a:t>
             </a:r>
           </a:p>
           <a:p>
@@ -7319,7 +7671,7 @@
               </a:defRPr>
             </a:pPr>
             <a:r>
-              <a:t>✔ Clasificación Marca vs Genérico: </a:t>
+              <a:t>✔ Estimación de Tiempos: </a:t>
             </a:r>
             <a:r>
               <a:rPr sz="1000" b="0">
@@ -7327,7 +7679,7 @@
                   <a:srgbClr val="64748B"/>
                 </a:solidFill>
               </a:rPr>
-              <a:t>Filtro para cumplir con la política nacional de disponibilidad de genéricos.</a:t>
+              <a:t>Cálculo del tiempo promedio en automóvil y a pie hacia la sucursal con stock.</a:t>
             </a:r>
           </a:p>
           <a:p>
@@ -7342,7 +7694,7 @@
               </a:defRPr>
             </a:pPr>
             <a:r>
-              <a:t>✔ Ajuste de Stock Auditado: </a:t>
+              <a:t>✔ Generador WhatsApp: </a:t>
             </a:r>
             <a:r>
               <a:rPr sz="1000" b="0">
@@ -7350,7 +7702,7 @@
                   <a:srgbClr val="64748B"/>
                 </a:solidFill>
               </a:rPr>
-              <a:t>Registro de ingresos físicos, regularizaciones y mermas con motivo justificado.</a:t>
+              <a:t>Copia formal con dirección, referencia, stock y enlace a Google Maps para el paciente.</a:t>
             </a:r>
           </a:p>
           <a:p>
@@ -7365,7 +7717,7 @@
               </a:defRPr>
             </a:pPr>
             <a:r>
-              <a:t>✔ Conexión con Kardex FEFO: </a:t>
+              <a:t>✔ No Pérdida de Venta: </a:t>
             </a:r>
             <a:r>
               <a:rPr sz="1000" b="0">
@@ -7373,7 +7725,7 @@
                   <a:srgbClr val="64748B"/>
                 </a:solidFill>
               </a:rPr>
-              <a:t>Acceso directo a la hoja de vida, historial de movimientos y lotes de cada fármaco.</a:t>
+              <a:t>Garantiza que el paciente encuentre su medicina en la misma cadena en &lt;10 minutos.</a:t>
             </a:r>
           </a:p>
         </p:txBody>
@@ -7425,7 +7777,7 @@
       </p:sp>
       <p:pic>
         <p:nvPicPr>
-          <p:cNvPr id="11" name="Picture 10" descr="06_gestion_productos.png"/>
+          <p:cNvPr id="11" name="Picture 10" descr="05_modal_ruta_mapa.png"/>
           <p:cNvPicPr>
             <a:picLocks noChangeAspect="1"/>
           </p:cNvPicPr>
@@ -7676,7 +8028,7 @@
               </a:defRPr>
             </a:pPr>
             <a:r>
-              <a:t>AUDITORÍA Y BUENAS PRÁCTICAS FARMACÉUTICAS</a:t>
+              <a:t>MÓDULO DE GESTIÓN DE PRODUCTOS</a:t>
             </a:r>
           </a:p>
           <a:p>
@@ -7691,7 +8043,7 @@
               </a:defRPr>
             </a:pPr>
             <a:r>
-              <a:t>Trazabilidad por Lote y Kardex FEFO (BPA DIGEMID)</a:t>
+              <a:t>Gestión de Catálogo y Productos Farmacéuticos</a:t>
             </a:r>
           </a:p>
         </p:txBody>
@@ -7821,7 +8173,7 @@
               </a:defRPr>
             </a:pPr>
             <a:r>
-              <a:t>✔ Principio FEFO: </a:t>
+              <a:t>✔ Catálogo Multicategoría: </a:t>
             </a:r>
             <a:r>
               <a:rPr sz="1000" b="0">
@@ -7829,7 +8181,7 @@
                   <a:srgbClr val="64748B"/>
                 </a:solidFill>
               </a:rPr>
-              <a:t>Garantiza la salida prioritaria de lotes con fecha de vencimiento más próxima.</a:t>
+              <a:t>Antibióticos, Analgésicos, Antiinflamatorios y Oncológicos con EAN-13 y CAN DIGEMID.</a:t>
             </a:r>
           </a:p>
           <a:p>
@@ -7844,7 +8196,7 @@
               </a:defRPr>
             </a:pPr>
             <a:r>
-              <a:t>✔ Registro de Lote y Sanitario: </a:t>
+              <a:t>✔ Clasificación Marca vs Genérico: </a:t>
             </a:r>
             <a:r>
               <a:rPr sz="1000" b="0">
@@ -7852,7 +8204,7 @@
                   <a:srgbClr val="64748B"/>
                 </a:solidFill>
               </a:rPr>
-              <a:t>Trazabilidad con código de lote del fabricante y registro sanitario oficial.</a:t>
+              <a:t>Filtro para cumplir con la política nacional de disponibilidad de genéricos.</a:t>
             </a:r>
           </a:p>
           <a:p>
@@ -7867,7 +8219,7 @@
               </a:defRPr>
             </a:pPr>
             <a:r>
-              <a:t>✔ Historial Cronológico: </a:t>
+              <a:t>✔ Ajuste de Stock Auditado: </a:t>
             </a:r>
             <a:r>
               <a:rPr sz="1000" b="0">
@@ -7875,7 +8227,7 @@
                   <a:srgbClr val="64748B"/>
                 </a:solidFill>
               </a:rPr>
-              <a:t>Auditoría de Entradas, Salidas por Venta y Traslados con usuario responsable.</a:t>
+              <a:t>Registro de ingresos físicos, regularizaciones y mermas con motivo justificado.</a:t>
             </a:r>
           </a:p>
           <a:p>
@@ -7890,7 +8242,7 @@
               </a:defRPr>
             </a:pPr>
             <a:r>
-              <a:t>✔ Certificación DIGEMID: </a:t>
+              <a:t>✔ Conexión con Kardex FEFO: </a:t>
             </a:r>
             <a:r>
               <a:rPr sz="1000" b="0">
@@ -7898,7 +8250,7 @@
                   <a:srgbClr val="64748B"/>
                 </a:solidFill>
               </a:rPr>
-              <a:t>Cumplimiento estricto del Manual de BPA aprobado por R.M. N° 833-2015/MINSA.</a:t>
+              <a:t>Acceso directo a la hoja de vida, historial de movimientos y lotes de cada fármaco.</a:t>
             </a:r>
           </a:p>
         </p:txBody>
@@ -7950,7 +8302,7 @@
       </p:sp>
       <p:pic>
         <p:nvPicPr>
-          <p:cNvPr id="11" name="Picture 10" descr="07_modal_kardex_trazabilidad.png"/>
+          <p:cNvPr id="11" name="Picture 10" descr="06_gestion_productos.png"/>
           <p:cNvPicPr>
             <a:picLocks noChangeAspect="1"/>
           </p:cNvPicPr>
@@ -8201,7 +8553,7 @@
               </a:defRPr>
             </a:pPr>
             <a:r>
-              <a:t>MÓDULO DE GESTIÓN DE SEDES</a:t>
+              <a:t>AUDITORÍA Y BUENAS PRÁCTICAS FARMACÉUTICAS</a:t>
             </a:r>
           </a:p>
           <a:p>
@@ -8216,7 +8568,7 @@
               </a:defRPr>
             </a:pPr>
             <a:r>
-              <a:t>Administración Centralizada de 15 Sedes en el Perú</a:t>
+              <a:t>Trazabilidad por Lote y Kardex FEFO (BPA DIGEMID)</a:t>
             </a:r>
           </a:p>
         </p:txBody>
@@ -8346,7 +8698,7 @@
               </a:defRPr>
             </a:pPr>
             <a:r>
-              <a:t>✔ Distribución Geográfica Nacional: </a:t>
+              <a:t>✔ Principio FEFO: </a:t>
             </a:r>
             <a:r>
               <a:rPr sz="1000" b="0">
@@ -8354,7 +8706,7 @@
                   <a:srgbClr val="64748B"/>
                 </a:solidFill>
               </a:rPr>
-              <a:t>10 sedes en Lima Metropolitana y Callao + 5 sedes en Arequipa, Cusco, Trujillo, Chiclayo y Huancayo.</a:t>
+              <a:t>Garantiza la salida prioritaria de lotes con fecha de vencimiento más próxima.</a:t>
             </a:r>
           </a:p>
           <a:p>
@@ -8369,7 +8721,7 @@
               </a:defRPr>
             </a:pPr>
             <a:r>
-              <a:t>✔ Ficha Técnica 360°: </a:t>
+              <a:t>✔ Registro de Lote y Sanitario: </a:t>
             </a:r>
             <a:r>
               <a:rPr sz="1000" b="0">
@@ -8377,7 +8729,7 @@
                   <a:srgbClr val="64748B"/>
                 </a:solidFill>
               </a:rPr>
-              <a:t>Dirección exacta, teléfono, horario de atención y Director Técnico colegiado.</a:t>
+              <a:t>Trazabilidad con código de lote del fabricante y registro sanitario oficial.</a:t>
             </a:r>
           </a:p>
           <a:p>
@@ -8392,7 +8744,7 @@
               </a:defRPr>
             </a:pPr>
             <a:r>
-              <a:t>✔ Métricas Operativas: </a:t>
+              <a:t>✔ Historial Cronológico: </a:t>
             </a:r>
             <a:r>
               <a:rPr sz="1000" b="0">
@@ -8400,7 +8752,7 @@
                   <a:srgbClr val="64748B"/>
                 </a:solidFill>
               </a:rPr>
-              <a:t>Monitoreo del total de medicamentos, stock crítico y balance de transferencias.</a:t>
+              <a:t>Auditoría de Entradas, Salidas por Venta y Traslados con usuario responsable.</a:t>
             </a:r>
           </a:p>
           <a:p>
@@ -8415,7 +8767,7 @@
               </a:defRPr>
             </a:pPr>
             <a:r>
-              <a:t>✔ Filtros por Cadena: </a:t>
+              <a:t>✔ Certificación DIGEMID: </a:t>
             </a:r>
             <a:r>
               <a:rPr sz="1000" b="0">
@@ -8423,7 +8775,7 @@
                   <a:srgbClr val="64748B"/>
                 </a:solidFill>
               </a:rPr>
-              <a:t>Clasificación instantánea entre InkaFarma, Mifarma y CD Huachipa.</a:t>
+              <a:t>Cumplimiento estricto del Manual de BPA aprobado por R.M. N° 833-2015/MINSA.</a:t>
             </a:r>
           </a:p>
         </p:txBody>
@@ -8475,7 +8827,7 @@
       </p:sp>
       <p:pic>
         <p:nvPicPr>
-          <p:cNvPr id="11" name="Picture 10" descr="08_gestion_sedes.png"/>
+          <p:cNvPr id="11" name="Picture 10" descr="07_modal_kardex_trazabilidad.png"/>
           <p:cNvPicPr>
             <a:picLocks noChangeAspect="1"/>
           </p:cNvPicPr>
@@ -8726,7 +9078,7 @@
               </a:defRPr>
             </a:pPr>
             <a:r>
-              <a:t>MÓDULO DE INTELIGENCIA PREDICTIVA</a:t>
+              <a:t>MÓDULO DE GESTIÓN DE SEDES</a:t>
             </a:r>
           </a:p>
           <a:p>
@@ -8741,7 +9093,7 @@
               </a:defRPr>
             </a:pPr>
             <a:r>
-              <a:t>Motor de Alertas Predictivas de Demanda con IA (CU04)</a:t>
+              <a:t>Administración Centralizada de 15 Sedes en el Perú</a:t>
             </a:r>
           </a:p>
         </p:txBody>
@@ -8871,7 +9223,7 @@
               </a:defRPr>
             </a:pPr>
             <a:r>
-              <a:t>✔ Consumo Diario Promedio: </a:t>
+              <a:t>✔ Distribución Geográfica Nacional: </a:t>
             </a:r>
             <a:r>
               <a:rPr sz="1000" b="0">
@@ -8879,7 +9231,7 @@
                   <a:srgbClr val="64748B"/>
                 </a:solidFill>
               </a:rPr>
-              <a:t>Algoritmo estadístico que analiza la dispensación para estimar la tasa diaria de salida.</a:t>
+              <a:t>10 sedes en Lima Metropolitana y Callao + 5 sedes en Arequipa, Cusco, Trujillo, Chiclayo y Huancayo.</a:t>
             </a:r>
           </a:p>
           <a:p>
@@ -8894,7 +9246,7 @@
               </a:defRPr>
             </a:pPr>
             <a:r>
-              <a:t>✔ Predicción de Quiebre a 7 Días: </a:t>
+              <a:t>✔ Ficha Técnica 360°: </a:t>
             </a:r>
             <a:r>
               <a:rPr sz="1000" b="0">
@@ -8902,7 +9254,7 @@
                   <a:srgbClr val="64748B"/>
                 </a:solidFill>
               </a:rPr>
-              <a:t>Identifica fármacos que agotarán existencias en menos de 7 días preventivamente.</a:t>
+              <a:t>Dirección exacta, teléfono, horario de atención y Director Técnico colegiado.</a:t>
             </a:r>
           </a:p>
           <a:p>
@@ -8917,7 +9269,7 @@
               </a:defRPr>
             </a:pPr>
             <a:r>
-              <a:t>✔ Autonomía Operativa en Días: </a:t>
+              <a:t>✔ Métricas Operativas: </a:t>
             </a:r>
             <a:r>
               <a:rPr sz="1000" b="0">
@@ -8925,7 +9277,7 @@
                   <a:srgbClr val="64748B"/>
                 </a:solidFill>
               </a:rPr>
-              <a:t>Calcula la cantidad de días de cobertura restante por sucursal.</a:t>
+              <a:t>Monitoreo del total de medicamentos, stock crítico y balance de transferencias.</a:t>
             </a:r>
           </a:p>
           <a:p>
@@ -8940,7 +9292,7 @@
               </a:defRPr>
             </a:pPr>
             <a:r>
-              <a:t>✔ Acción Inmediata: </a:t>
+              <a:t>✔ Filtros por Cadena: </a:t>
             </a:r>
             <a:r>
               <a:rPr sz="1000" b="0">
@@ -8948,7 +9300,7 @@
                   <a:srgbClr val="64748B"/>
                 </a:solidFill>
               </a:rPr>
-              <a:t>Generación preventiva de traslados inter-sedes con un clic desde el panel de alertas.</a:t>
+              <a:t>Clasificación instantánea entre InkaFarma, Mifarma y CD Huachipa.</a:t>
             </a:r>
           </a:p>
         </p:txBody>
@@ -9000,7 +9352,7 @@
       </p:sp>
       <p:pic>
         <p:nvPicPr>
-          <p:cNvPr id="11" name="Picture 10" descr="09_alertas_predictivas.png"/>
+          <p:cNvPr id="11" name="Picture 10" descr="08_gestion_sedes.png"/>
           <p:cNvPicPr>
             <a:picLocks noChangeAspect="1"/>
           </p:cNvPicPr>
@@ -9735,7 +10087,7 @@
               </a:defRPr>
             </a:pPr>
             <a:r>
-              <a:t>MÓDULO DE LOGÍSTICA Y TRIBUTACIÓN</a:t>
+              <a:t>MÓDULO DE INTELIGENCIA PREDICTIVA</a:t>
             </a:r>
           </a:p>
           <a:p>
@@ -9750,7 +10102,7 @@
               </a:defRPr>
             </a:pPr>
             <a:r>
-              <a:t>Bandeja de Traslados y Guía de Remisión GRE SUNAT (CU05)</a:t>
+              <a:t>Motor de Alertas Predictivas de Demanda con IA (CU04)</a:t>
             </a:r>
           </a:p>
         </p:txBody>
@@ -9880,7 +10232,7 @@
               </a:defRPr>
             </a:pPr>
             <a:r>
-              <a:t>✔ Flujo de Estados Operativos: </a:t>
+              <a:t>✔ Consumo Diario Promedio: </a:t>
             </a:r>
             <a:r>
               <a:rPr sz="1000" b="0">
@@ -9888,7 +10240,7 @@
                   <a:srgbClr val="64748B"/>
                 </a:solidFill>
               </a:rPr>
-              <a:t>Seguimiento riguroso: PENDIENTE ➔ DESPACHADO ➔ EN TRÁNSITO ➔ COMPLETADO.</a:t>
+              <a:t>Algoritmo estadístico que analiza la dispensación para estimar la tasa diaria de salida.</a:t>
             </a:r>
           </a:p>
           <a:p>
@@ -9903,7 +10255,7 @@
               </a:defRPr>
             </a:pPr>
             <a:r>
-              <a:t>✔ Guía de Remisión (GRE): </a:t>
+              <a:t>✔ Predicción de Quiebre a 7 Días: </a:t>
             </a:r>
             <a:r>
               <a:rPr sz="1000" b="0">
@@ -9911,7 +10263,7 @@
                   <a:srgbClr val="64748B"/>
                 </a:solidFill>
               </a:rPr>
-              <a:t>Cumplimiento SUNAT con serie correlativa, RUC transportista, placa y precinto.</a:t>
+              <a:t>Identifica fármacos que agotarán existencias en menos de 7 días preventivamente.</a:t>
             </a:r>
           </a:p>
           <a:p>
@@ -9926,7 +10278,7 @@
               </a:defRPr>
             </a:pPr>
             <a:r>
-              <a:t>✔ Código QR y Firma Fiscal: </a:t>
+              <a:t>✔ Autonomía Operativa en Días: </a:t>
             </a:r>
             <a:r>
               <a:rPr sz="1000" b="0">
@@ -9934,7 +10286,7 @@
                   <a:srgbClr val="64748B"/>
                 </a:solidFill>
               </a:rPr>
-              <a:t>Generación del código QR de validación fiscal y trazabilidad de custodia.</a:t>
+              <a:t>Calcula la cantidad de días de cobertura restante por sucursal.</a:t>
             </a:r>
           </a:p>
           <a:p>
@@ -9949,7 +10301,7 @@
               </a:defRPr>
             </a:pPr>
             <a:r>
-              <a:t>✔ Recepción con Control de Calidad: </a:t>
+              <a:t>✔ Acción Inmediata: </a:t>
             </a:r>
             <a:r>
               <a:rPr sz="1000" b="0">
@@ -9957,7 +10309,7 @@
                   <a:srgbClr val="64748B"/>
                 </a:solidFill>
               </a:rPr>
-              <a:t>Inspección de precintos íntegros y temperatura al recepcionar mercadería.</a:t>
+              <a:t>Generación preventiva de traslados inter-sedes con un clic desde el panel de alertas.</a:t>
             </a:r>
           </a:p>
         </p:txBody>
@@ -10009,7 +10361,7 @@
       </p:sp>
       <p:pic>
         <p:nvPicPr>
-          <p:cNvPr id="11" name="Picture 10" descr="10_gestion_traslados.png"/>
+          <p:cNvPr id="11" name="Picture 10" descr="09_alertas_predictivas.png"/>
           <p:cNvPicPr>
             <a:picLocks noChangeAspect="1"/>
           </p:cNvPicPr>
@@ -10040,6 +10392,531 @@
 </file>
 
 <file path=ppt/slides/slide21.xml><?xml version="1.0" encoding="utf-8"?>
+<p:sld xmlns:a="http://schemas.openxmlformats.org/drawingml/2006/main" xmlns:p="http://schemas.openxmlformats.org/presentationml/2006/main" xmlns:r="http://schemas.openxmlformats.org/officeDocument/2006/relationships">
+  <p:cSld>
+    <p:spTree>
+      <p:nvGrpSpPr>
+        <p:cNvPr id="1" name=""/>
+        <p:cNvGrpSpPr/>
+        <p:nvPr/>
+      </p:nvGrpSpPr>
+      <p:grpSpPr/>
+      <p:sp>
+        <p:nvSpPr>
+          <p:cNvPr id="2" name="Rectangle 1"/>
+          <p:cNvSpPr/>
+          <p:nvPr/>
+        </p:nvSpPr>
+        <p:spPr>
+          <a:xfrm>
+            <a:off x="0" y="0"/>
+            <a:ext cx="12191695" cy="6858000"/>
+          </a:xfrm>
+          <a:prstGeom prst="rect">
+            <a:avLst/>
+          </a:prstGeom>
+          <a:solidFill>
+            <a:srgbClr val="F8FAFC"/>
+          </a:solidFill>
+          <a:ln>
+            <a:noFill/>
+          </a:ln>
+        </p:spPr>
+        <p:style>
+          <a:lnRef idx="1">
+            <a:schemeClr val="accent1"/>
+          </a:lnRef>
+          <a:fillRef idx="3">
+            <a:schemeClr val="accent1"/>
+          </a:fillRef>
+          <a:effectRef idx="2">
+            <a:schemeClr val="accent1"/>
+          </a:effectRef>
+          <a:fontRef idx="minor">
+            <a:schemeClr val="lt1"/>
+          </a:fontRef>
+        </p:style>
+        <p:txBody>
+          <a:bodyPr rtlCol="0" anchor="ctr"/>
+          <a:lstStyle/>
+          <a:p>
+            <a:pPr algn="ctr"/>
+          </a:p>
+        </p:txBody>
+      </p:sp>
+      <p:sp>
+        <p:nvSpPr>
+          <p:cNvPr id="3" name="Rectangle 2"/>
+          <p:cNvSpPr/>
+          <p:nvPr/>
+        </p:nvSpPr>
+        <p:spPr>
+          <a:xfrm>
+            <a:off x="0" y="0"/>
+            <a:ext cx="12191695" cy="1005840"/>
+          </a:xfrm>
+          <a:prstGeom prst="rect">
+            <a:avLst/>
+          </a:prstGeom>
+          <a:solidFill>
+            <a:srgbClr val="002B66"/>
+          </a:solidFill>
+          <a:ln>
+            <a:noFill/>
+          </a:ln>
+        </p:spPr>
+        <p:style>
+          <a:lnRef idx="1">
+            <a:schemeClr val="accent1"/>
+          </a:lnRef>
+          <a:fillRef idx="3">
+            <a:schemeClr val="accent1"/>
+          </a:fillRef>
+          <a:effectRef idx="2">
+            <a:schemeClr val="accent1"/>
+          </a:effectRef>
+          <a:fontRef idx="minor">
+            <a:schemeClr val="lt1"/>
+          </a:fontRef>
+        </p:style>
+        <p:txBody>
+          <a:bodyPr rtlCol="0" anchor="ctr"/>
+          <a:lstStyle/>
+          <a:p>
+            <a:pPr algn="ctr"/>
+          </a:p>
+        </p:txBody>
+      </p:sp>
+      <p:sp>
+        <p:nvSpPr>
+          <p:cNvPr id="4" name="Rectangle 3"/>
+          <p:cNvSpPr/>
+          <p:nvPr/>
+        </p:nvSpPr>
+        <p:spPr>
+          <a:xfrm>
+            <a:off x="0" y="987552"/>
+            <a:ext cx="12191695" cy="36576"/>
+          </a:xfrm>
+          <a:prstGeom prst="rect">
+            <a:avLst/>
+          </a:prstGeom>
+          <a:solidFill>
+            <a:srgbClr val="FFD100"/>
+          </a:solidFill>
+          <a:ln>
+            <a:noFill/>
+          </a:ln>
+        </p:spPr>
+        <p:style>
+          <a:lnRef idx="1">
+            <a:schemeClr val="accent1"/>
+          </a:lnRef>
+          <a:fillRef idx="3">
+            <a:schemeClr val="accent1"/>
+          </a:fillRef>
+          <a:effectRef idx="2">
+            <a:schemeClr val="accent1"/>
+          </a:effectRef>
+          <a:fontRef idx="minor">
+            <a:schemeClr val="lt1"/>
+          </a:fontRef>
+        </p:style>
+        <p:txBody>
+          <a:bodyPr rtlCol="0" anchor="ctr"/>
+          <a:lstStyle/>
+          <a:p>
+            <a:pPr algn="ctr"/>
+          </a:p>
+        </p:txBody>
+      </p:sp>
+      <p:sp>
+        <p:nvSpPr>
+          <p:cNvPr id="5" name="Rounded Rectangle 4"/>
+          <p:cNvSpPr/>
+          <p:nvPr/>
+        </p:nvSpPr>
+        <p:spPr>
+          <a:xfrm>
+            <a:off x="10789920" y="228600"/>
+            <a:ext cx="914400" cy="502920"/>
+          </a:xfrm>
+          <a:prstGeom prst="roundRect">
+            <a:avLst/>
+          </a:prstGeom>
+          <a:solidFill>
+            <a:srgbClr val="C8102E"/>
+          </a:solidFill>
+          <a:ln>
+            <a:noFill/>
+          </a:ln>
+        </p:spPr>
+        <p:style>
+          <a:lnRef idx="1">
+            <a:schemeClr val="accent1"/>
+          </a:lnRef>
+          <a:fillRef idx="3">
+            <a:schemeClr val="accent1"/>
+          </a:fillRef>
+          <a:effectRef idx="2">
+            <a:schemeClr val="accent1"/>
+          </a:effectRef>
+          <a:fontRef idx="minor">
+            <a:schemeClr val="lt1"/>
+          </a:fontRef>
+        </p:style>
+        <p:txBody>
+          <a:bodyPr rtlCol="0" anchor="ctr"/>
+          <a:lstStyle/>
+          <a:p>
+            <a:pPr algn="ctr">
+              <a:defRPr b="1" sz="1400">
+                <a:solidFill>
+                  <a:srgbClr val="FFFFFF"/>
+                </a:solidFill>
+              </a:defRPr>
+            </a:pPr>
+            <a:r>
+              <a:t>UTP</a:t>
+            </a:r>
+          </a:p>
+        </p:txBody>
+      </p:sp>
+      <p:sp>
+        <p:nvSpPr>
+          <p:cNvPr id="6" name="TextBox 5"/>
+          <p:cNvSpPr txBox="1"/>
+          <p:nvPr/>
+        </p:nvSpPr>
+        <p:spPr>
+          <a:xfrm>
+            <a:off x="548640" y="109728"/>
+            <a:ext cx="10058400" cy="777240"/>
+          </a:xfrm>
+          <a:prstGeom prst="rect">
+            <a:avLst/>
+          </a:prstGeom>
+          <a:noFill/>
+        </p:spPr>
+        <p:txBody>
+          <a:bodyPr wrap="square">
+            <a:spAutoFit/>
+          </a:bodyPr>
+          <a:lstStyle/>
+          <a:p>
+            <a:pPr>
+              <a:defRPr sz="1000" b="1">
+                <a:solidFill>
+                  <a:srgbClr val="FFD100"/>
+                </a:solidFill>
+              </a:defRPr>
+            </a:pPr>
+            <a:r>
+              <a:t>MÓDULO DE LOGÍSTICA Y TRIBUTACIÓN</a:t>
+            </a:r>
+          </a:p>
+          <a:p>
+            <a:pPr>
+              <a:spcBef>
+                <a:spcPts val="200"/>
+              </a:spcBef>
+              <a:defRPr sz="2200" b="1">
+                <a:solidFill>
+                  <a:srgbClr val="FFFFFF"/>
+                </a:solidFill>
+              </a:defRPr>
+            </a:pPr>
+            <a:r>
+              <a:t>Bandeja de Traslados y Guía de Remisión GRE SUNAT (CU05)</a:t>
+            </a:r>
+          </a:p>
+        </p:txBody>
+      </p:sp>
+      <p:sp>
+        <p:nvSpPr>
+          <p:cNvPr id="7" name="TextBox 6"/>
+          <p:cNvSpPr txBox="1"/>
+          <p:nvPr/>
+        </p:nvSpPr>
+        <p:spPr>
+          <a:xfrm>
+            <a:off x="548640" y="6565392"/>
+            <a:ext cx="10972800" cy="256032"/>
+          </a:xfrm>
+          <a:prstGeom prst="rect">
+            <a:avLst/>
+          </a:prstGeom>
+          <a:noFill/>
+        </p:spPr>
+        <p:txBody>
+          <a:bodyPr wrap="none">
+            <a:spAutoFit/>
+          </a:bodyPr>
+          <a:lstStyle/>
+          <a:p>
+            <a:pPr>
+              <a:defRPr sz="850">
+                <a:solidFill>
+                  <a:srgbClr val="64748B"/>
+                </a:solidFill>
+              </a:defRPr>
+            </a:pPr>
+            <a:r>
+              <a:t>CURSO INTEGRADOR I: SISTEMAS - SOFTWARE • AVANCE 3 • UTP 2026 • Mendoza Paucar Ronny (U25302314)</a:t>
+            </a:r>
+          </a:p>
+        </p:txBody>
+      </p:sp>
+      <p:sp>
+        <p:nvSpPr>
+          <p:cNvPr id="8" name="Rounded Rectangle 7"/>
+          <p:cNvSpPr/>
+          <p:nvPr/>
+        </p:nvSpPr>
+        <p:spPr>
+          <a:xfrm>
+            <a:off x="548640" y="1188720"/>
+            <a:ext cx="4114800" cy="5303520"/>
+          </a:xfrm>
+          <a:prstGeom prst="roundRect">
+            <a:avLst/>
+          </a:prstGeom>
+          <a:solidFill>
+            <a:srgbClr val="FFFFFF"/>
+          </a:solidFill>
+          <a:ln w="12700">
+            <a:solidFill>
+              <a:srgbClr val="E2E8F0"/>
+            </a:solidFill>
+          </a:ln>
+        </p:spPr>
+        <p:style>
+          <a:lnRef idx="1">
+            <a:schemeClr val="accent1"/>
+          </a:lnRef>
+          <a:fillRef idx="3">
+            <a:schemeClr val="accent1"/>
+          </a:fillRef>
+          <a:effectRef idx="2">
+            <a:schemeClr val="accent1"/>
+          </a:effectRef>
+          <a:fontRef idx="minor">
+            <a:schemeClr val="lt1"/>
+          </a:fontRef>
+        </p:style>
+        <p:txBody>
+          <a:bodyPr rtlCol="0" anchor="ctr"/>
+          <a:lstStyle/>
+          <a:p>
+            <a:pPr algn="ctr"/>
+          </a:p>
+        </p:txBody>
+      </p:sp>
+      <p:sp>
+        <p:nvSpPr>
+          <p:cNvPr id="9" name="TextBox 8"/>
+          <p:cNvSpPr txBox="1"/>
+          <p:nvPr/>
+        </p:nvSpPr>
+        <p:spPr>
+          <a:xfrm>
+            <a:off x="731520" y="1371600"/>
+            <a:ext cx="3749039" cy="4937760"/>
+          </a:xfrm>
+          <a:prstGeom prst="rect">
+            <a:avLst/>
+          </a:prstGeom>
+          <a:noFill/>
+        </p:spPr>
+        <p:txBody>
+          <a:bodyPr wrap="square">
+            <a:spAutoFit/>
+          </a:bodyPr>
+          <a:lstStyle/>
+          <a:p>
+            <a:pPr>
+              <a:defRPr sz="1300" b="1">
+                <a:solidFill>
+                  <a:srgbClr val="002B66"/>
+                </a:solidFill>
+              </a:defRPr>
+            </a:pPr>
+            <a:r>
+              <a:t>🎯 Criterios y Verificación de Prueba:</a:t>
+            </a:r>
+          </a:p>
+          <a:p>
+            <a:pPr>
+              <a:spcBef>
+                <a:spcPts val="1000"/>
+              </a:spcBef>
+              <a:defRPr sz="1100" b="1">
+                <a:solidFill>
+                  <a:srgbClr val="0F172A"/>
+                </a:solidFill>
+              </a:defRPr>
+            </a:pPr>
+            <a:r>
+              <a:t>✔ Flujo de Estados Operativos: </a:t>
+            </a:r>
+            <a:r>
+              <a:rPr sz="1000" b="0">
+                <a:solidFill>
+                  <a:srgbClr val="64748B"/>
+                </a:solidFill>
+              </a:rPr>
+              <a:t>Seguimiento riguroso: PENDIENTE ➔ DESPACHADO ➔ EN TRÁNSITO ➔ COMPLETADO.</a:t>
+            </a:r>
+          </a:p>
+          <a:p>
+            <a:pPr>
+              <a:spcBef>
+                <a:spcPts val="1000"/>
+              </a:spcBef>
+              <a:defRPr sz="1100" b="1">
+                <a:solidFill>
+                  <a:srgbClr val="0F172A"/>
+                </a:solidFill>
+              </a:defRPr>
+            </a:pPr>
+            <a:r>
+              <a:t>✔ Guía de Remisión (GRE): </a:t>
+            </a:r>
+            <a:r>
+              <a:rPr sz="1000" b="0">
+                <a:solidFill>
+                  <a:srgbClr val="64748B"/>
+                </a:solidFill>
+              </a:rPr>
+              <a:t>Cumplimiento SUNAT con serie correlativa, RUC transportista, placa y precinto.</a:t>
+            </a:r>
+          </a:p>
+          <a:p>
+            <a:pPr>
+              <a:spcBef>
+                <a:spcPts val="1000"/>
+              </a:spcBef>
+              <a:defRPr sz="1100" b="1">
+                <a:solidFill>
+                  <a:srgbClr val="0F172A"/>
+                </a:solidFill>
+              </a:defRPr>
+            </a:pPr>
+            <a:r>
+              <a:t>✔ Código QR y Firma Fiscal: </a:t>
+            </a:r>
+            <a:r>
+              <a:rPr sz="1000" b="0">
+                <a:solidFill>
+                  <a:srgbClr val="64748B"/>
+                </a:solidFill>
+              </a:rPr>
+              <a:t>Generación del código QR de validación fiscal y trazabilidad de custodia.</a:t>
+            </a:r>
+          </a:p>
+          <a:p>
+            <a:pPr>
+              <a:spcBef>
+                <a:spcPts val="1000"/>
+              </a:spcBef>
+              <a:defRPr sz="1100" b="1">
+                <a:solidFill>
+                  <a:srgbClr val="0F172A"/>
+                </a:solidFill>
+              </a:defRPr>
+            </a:pPr>
+            <a:r>
+              <a:t>✔ Recepción con Control de Calidad: </a:t>
+            </a:r>
+            <a:r>
+              <a:rPr sz="1000" b="0">
+                <a:solidFill>
+                  <a:srgbClr val="64748B"/>
+                </a:solidFill>
+              </a:rPr>
+              <a:t>Inspección de precintos íntegros y temperatura al recepcionar mercadería.</a:t>
+            </a:r>
+          </a:p>
+        </p:txBody>
+      </p:sp>
+      <p:sp>
+        <p:nvSpPr>
+          <p:cNvPr id="10" name="Rectangle 9"/>
+          <p:cNvSpPr/>
+          <p:nvPr/>
+        </p:nvSpPr>
+        <p:spPr>
+          <a:xfrm>
+            <a:off x="4846320" y="1188720"/>
+            <a:ext cx="6766560" cy="5303520"/>
+          </a:xfrm>
+          <a:prstGeom prst="rect">
+            <a:avLst/>
+          </a:prstGeom>
+          <a:solidFill>
+            <a:srgbClr val="FFFFFF"/>
+          </a:solidFill>
+          <a:ln w="19050">
+            <a:solidFill>
+              <a:srgbClr val="E2E8F0"/>
+            </a:solidFill>
+          </a:ln>
+        </p:spPr>
+        <p:style>
+          <a:lnRef idx="1">
+            <a:schemeClr val="accent1"/>
+          </a:lnRef>
+          <a:fillRef idx="3">
+            <a:schemeClr val="accent1"/>
+          </a:fillRef>
+          <a:effectRef idx="2">
+            <a:schemeClr val="accent1"/>
+          </a:effectRef>
+          <a:fontRef idx="minor">
+            <a:schemeClr val="lt1"/>
+          </a:fontRef>
+        </p:style>
+        <p:txBody>
+          <a:bodyPr rtlCol="0" anchor="ctr"/>
+          <a:lstStyle/>
+          <a:p>
+            <a:pPr algn="ctr"/>
+          </a:p>
+        </p:txBody>
+      </p:sp>
+      <p:pic>
+        <p:nvPicPr>
+          <p:cNvPr id="11" name="Picture 10" descr="10_gestion_traslados.png"/>
+          <p:cNvPicPr>
+            <a:picLocks noChangeAspect="1"/>
+          </p:cNvPicPr>
+          <p:nvPr/>
+        </p:nvPicPr>
+        <p:blipFill>
+          <a:blip r:embed="rId2"/>
+          <a:stretch>
+            <a:fillRect/>
+          </a:stretch>
+        </p:blipFill>
+        <p:spPr>
+          <a:xfrm>
+            <a:off x="4892040" y="1234440"/>
+            <a:ext cx="6675120" cy="5212080"/>
+          </a:xfrm>
+          <a:prstGeom prst="rect">
+            <a:avLst/>
+          </a:prstGeom>
+        </p:spPr>
+      </p:pic>
+    </p:spTree>
+  </p:cSld>
+  <p:clrMapOvr>
+    <a:masterClrMapping/>
+  </p:clrMapOvr>
+</p:sld>
+</file>
+
+<file path=ppt/slides/slide22.xml><?xml version="1.0" encoding="utf-8"?>
 <p:sld xmlns:a="http://schemas.openxmlformats.org/drawingml/2006/main" xmlns:p="http://schemas.openxmlformats.org/presentationml/2006/main" xmlns:r="http://schemas.openxmlformats.org/officeDocument/2006/relationships">
   <p:cSld>
     <p:spTree>
